--- a/assets/figures-editable/c3-c4/c3-e33.pptx
+++ b/assets/figures-editable/c3-c4/c3-e33.pptx
@@ -3104,8 +3104,8 @@
         </p:nvSpPr>
         <p:spPr>
           <a:xfrm>
-            <a:off x="274320" y="137160"/>
-            <a:ext cx="11612880" cy="365760"/>
+            <a:off x="274320" y="118872"/>
+            <a:ext cx="11612880" cy="340105"/>
           </a:xfrm>
           <a:prstGeom prst="rect">
             <a:avLst/>
@@ -3114,7 +3114,7 @@
           <a:effectLst/>
         </p:spPr>
         <p:txBody>
-          <a:bodyPr wrap="square" lIns="27432" rIns="27432" tIns="18288" bIns="18288" anchor="ctr">
+          <a:bodyPr wrap="none" lIns="18288" rIns="18288" tIns="18288" bIns="18288" anchor="t">
             <a:spAutoFit/>
           </a:bodyPr>
           <a:lstStyle/>
@@ -3125,7 +3125,7 @@
               </a:spcAft>
             </a:pPr>
             <a:r>
-              <a:rPr sz="2100" b="0" i="0">
+              <a:rPr sz="1900" b="1" i="0">
                 <a:solidFill>
                   <a:srgbClr val="8EDBD4"/>
                 </a:solidFill>
@@ -3136,23 +3136,20 @@
           </a:p>
         </p:txBody>
       </p:sp>
-      <p:sp>
-        <p:nvSpPr>
-          <p:cNvPr id="3" name="C3-E33 rect 1" descr="sci-ppt:o001"/>
-          <p:cNvSpPr/>
+      <p:cxnSp>
+        <p:nvCxnSpPr>
+          <p:cNvPr id="3" name="C3-E33 line 1" descr="sci-ppt:o001"/>
+          <p:cNvCxnSpPr/>
           <p:nvPr/>
-        </p:nvSpPr>
-        <p:spPr>
-          <a:xfrm>
-            <a:off x="731520" y="1508760"/>
-            <a:ext cx="4937760" cy="731520"/>
-          </a:xfrm>
-          <a:prstGeom prst="rect">
+        </p:nvCxnSpPr>
+        <p:spPr>
+          <a:xfrm>
+            <a:off x="8686800" y="4526280"/>
+            <a:ext cx="3017520" cy="0"/>
+          </a:xfrm>
+          <a:prstGeom prst="line">
             <a:avLst/>
           </a:prstGeom>
-          <a:solidFill>
-            <a:srgbClr val="213E4B"/>
-          </a:solidFill>
           <a:ln w="19050">
             <a:solidFill>
               <a:srgbClr val="B4C7D2"/>
@@ -3160,78 +3157,51 @@
           </a:ln>
           <a:effectLst/>
         </p:spPr>
-        <p:txBody>
-          <a:bodyPr rtlCol="0" anchor="ctr"/>
-          <a:lstStyle/>
-          <a:p>
-            <a:pPr algn="ctr"/>
-          </a:p>
-        </p:txBody>
-      </p:sp>
+      </p:cxnSp>
       <p:cxnSp>
         <p:nvCxnSpPr>
-          <p:cNvPr id="4" name="C3-E33 arrow 2" descr="sci-ppt:o002"/>
+          <p:cNvPr id="4" name="C3-E33 line 2" descr="sci-ppt:o002"/>
           <p:cNvCxnSpPr/>
           <p:nvPr/>
         </p:nvCxnSpPr>
         <p:spPr>
           <a:xfrm>
-            <a:off x="1005840" y="1874519"/>
-            <a:ext cx="4297680" cy="0"/>
+            <a:off x="8686800" y="1783080"/>
+            <a:ext cx="0" cy="2743200"/>
           </a:xfrm>
           <a:prstGeom prst="line">
             <a:avLst/>
           </a:prstGeom>
-          <a:ln w="25400">
+          <a:ln w="19050">
             <a:solidFill>
-              <a:srgbClr val="8EDBD4"/>
+              <a:srgbClr val="B4C7D2"/>
             </a:solidFill>
-            <a:headEnd type="none" w="med" len="med"/>
-            <a:tailEnd type="triangle" w="med" len="med"/>
           </a:ln>
           <a:effectLst/>
         </p:spPr>
       </p:cxnSp>
-      <p:sp>
-        <p:nvSpPr>
-          <p:cNvPr id="5" name="C3-E33 text 3" descr="sci-ppt:o003"/>
-          <p:cNvSpPr txBox="1"/>
+      <p:cxnSp>
+        <p:nvCxnSpPr>
+          <p:cNvPr id="5" name="C3-E33 line 3" descr="sci-ppt:o003"/>
+          <p:cNvCxnSpPr/>
           <p:nvPr/>
-        </p:nvSpPr>
-        <p:spPr>
-          <a:xfrm>
-            <a:off x="1463040" y="1051560"/>
-            <a:ext cx="3931920" cy="365760"/>
-          </a:xfrm>
-          <a:prstGeom prst="rect">
+        </p:nvCxnSpPr>
+        <p:spPr>
+          <a:xfrm>
+            <a:off x="8686800" y="4526280"/>
+            <a:ext cx="0" cy="64008"/>
+          </a:xfrm>
+          <a:prstGeom prst="line">
             <a:avLst/>
           </a:prstGeom>
-          <a:noFill/>
+          <a:ln w="12700">
+            <a:solidFill>
+              <a:srgbClr val="B4C7D2"/>
+            </a:solidFill>
+          </a:ln>
           <a:effectLst/>
         </p:spPr>
-        <p:txBody>
-          <a:bodyPr wrap="square" lIns="27432" rIns="27432" tIns="18288" bIns="18288" anchor="ctr">
-            <a:spAutoFit/>
-          </a:bodyPr>
-          <a:lstStyle/>
-          <a:p>
-            <a:pPr algn="l">
-              <a:spcAft>
-                <a:spcPts val="0"/>
-              </a:spcAft>
-            </a:pPr>
-            <a:r>
-              <a:rPr sz="1800" b="0" i="0">
-                <a:solidFill>
-                  <a:srgbClr val="E7F0F3"/>
-                </a:solidFill>
-                <a:latin typeface="Arial"/>
-              </a:rPr>
-              <a:t>Finite emitted liquid: m_j, E_j, U_j</a:t>
-            </a:r>
-          </a:p>
-        </p:txBody>
-      </p:sp>
+      </p:cxnSp>
       <p:cxnSp>
         <p:nvCxnSpPr>
           <p:cNvPr id="6" name="C3-E33 line 4" descr="sci-ppt:o004"/>
@@ -3240,15 +3210,15 @@
         </p:nvCxnSpPr>
         <p:spPr>
           <a:xfrm>
-            <a:off x="731520" y="2606040"/>
-            <a:ext cx="4937760" cy="0"/>
+            <a:off x="8686800" y="1783080"/>
+            <a:ext cx="0" cy="2743200"/>
           </a:xfrm>
           <a:prstGeom prst="line">
             <a:avLst/>
           </a:prstGeom>
-          <a:ln w="25400">
+          <a:ln w="7620">
             <a:solidFill>
-              <a:srgbClr val="8EDBD4"/>
+              <a:srgbClr val="2E4756"/>
             </a:solidFill>
           </a:ln>
           <a:effectLst/>
@@ -3262,8 +3232,8 @@
         </p:nvSpPr>
         <p:spPr>
           <a:xfrm>
-            <a:off x="2743200" y="2697480"/>
-            <a:ext cx="1828800" cy="365760"/>
+            <a:off x="8229600" y="4608576"/>
+            <a:ext cx="914400" cy="208407"/>
           </a:xfrm>
           <a:prstGeom prst="rect">
             <a:avLst/>
@@ -3272,24 +3242,24 @@
           <a:effectLst/>
         </p:spPr>
         <p:txBody>
-          <a:bodyPr wrap="square" lIns="27432" rIns="27432" tIns="18288" bIns="18288" anchor="ctr">
+          <a:bodyPr wrap="none" lIns="18288" rIns="18288" tIns="18288" bIns="18288" anchor="t">
             <a:spAutoFit/>
           </a:bodyPr>
           <a:lstStyle/>
           <a:p>
-            <a:pPr algn="l">
+            <a:pPr algn="ctr">
               <a:spcAft>
                 <a:spcPts val="0"/>
               </a:spcAft>
             </a:pPr>
             <a:r>
-              <a:rPr sz="1700" b="0" i="0">
+              <a:rPr sz="1050" b="0" i="0">
                 <a:solidFill>
-                  <a:srgbClr val="E7F0F3"/>
+                  <a:srgbClr val="B4C7D2"/>
                 </a:solidFill>
                 <a:latin typeface="Arial"/>
               </a:rPr>
-              <a:t>L_j</a:t>
+              <a:t>0.01</a:t>
             </a:r>
           </a:p>
         </p:txBody>
@@ -3302,30 +3272,52 @@
         </p:nvCxnSpPr>
         <p:spPr>
           <a:xfrm>
-            <a:off x="457200" y="1508760"/>
-            <a:ext cx="0" cy="731520"/>
+            <a:off x="10195560" y="4526280"/>
+            <a:ext cx="0" cy="64008"/>
           </a:xfrm>
           <a:prstGeom prst="line">
             <a:avLst/>
           </a:prstGeom>
-          <a:ln w="25400">
+          <a:ln w="12700">
             <a:solidFill>
-              <a:srgbClr val="8EDBD4"/>
+              <a:srgbClr val="B4C7D2"/>
             </a:solidFill>
           </a:ln>
           <a:effectLst/>
         </p:spPr>
       </p:cxnSp>
-      <p:sp>
-        <p:nvSpPr>
-          <p:cNvPr id="9" name="C3-E33 text 7" descr="sci-ppt:o007"/>
+      <p:cxnSp>
+        <p:nvCxnSpPr>
+          <p:cNvPr id="9" name="C3-E33 line 7" descr="sci-ppt:o007"/>
+          <p:cNvCxnSpPr/>
+          <p:nvPr/>
+        </p:nvCxnSpPr>
+        <p:spPr>
+          <a:xfrm>
+            <a:off x="10195560" y="1783080"/>
+            <a:ext cx="0" cy="2743200"/>
+          </a:xfrm>
+          <a:prstGeom prst="line">
+            <a:avLst/>
+          </a:prstGeom>
+          <a:ln w="7620">
+            <a:solidFill>
+              <a:srgbClr val="2E4756"/>
+            </a:solidFill>
+          </a:ln>
+          <a:effectLst/>
+        </p:spPr>
+      </p:cxnSp>
+      <p:sp>
+        <p:nvSpPr>
+          <p:cNvPr id="10" name="C3-E33 text 8" descr="sci-ppt:o008"/>
           <p:cNvSpPr txBox="1"/>
           <p:nvPr/>
         </p:nvSpPr>
         <p:spPr>
           <a:xfrm>
-            <a:off x="137160" y="2377440"/>
-            <a:ext cx="1645920" cy="320040"/>
+            <a:off x="9738360" y="4608576"/>
+            <a:ext cx="914400" cy="208407"/>
           </a:xfrm>
           <a:prstGeom prst="rect">
             <a:avLst/>
@@ -3334,94 +3326,82 @@
           <a:effectLst/>
         </p:spPr>
         <p:txBody>
-          <a:bodyPr wrap="square" lIns="27432" rIns="27432" tIns="18288" bIns="18288" anchor="ctr">
+          <a:bodyPr wrap="none" lIns="18288" rIns="18288" tIns="18288" bIns="18288" anchor="t">
             <a:spAutoFit/>
           </a:bodyPr>
           <a:lstStyle/>
           <a:p>
-            <a:pPr algn="l">
+            <a:pPr algn="ctr">
               <a:spcAft>
                 <a:spcPts val="0"/>
               </a:spcAft>
             </a:pPr>
             <a:r>
-              <a:rPr sz="1400" b="0" i="0">
+              <a:rPr sz="1050" b="0" i="0">
                 <a:solidFill>
-                  <a:srgbClr val="E7F0F3"/>
+                  <a:srgbClr val="B4C7D2"/>
                 </a:solidFill>
                 <a:latin typeface="Arial"/>
               </a:rPr>
-              <a:t>d_j = 2a_j</a:t>
-            </a:r>
-          </a:p>
-        </p:txBody>
-      </p:sp>
-      <p:sp>
-        <p:nvSpPr>
-          <p:cNvPr id="10" name="C3-E33 rect 8" descr="sci-ppt:o008"/>
-          <p:cNvSpPr/>
+              <a:t>1</a:t>
+            </a:r>
+          </a:p>
+        </p:txBody>
+      </p:sp>
+      <p:cxnSp>
+        <p:nvCxnSpPr>
+          <p:cNvPr id="11" name="C3-E33 line 9" descr="sci-ppt:o009"/>
+          <p:cNvCxnSpPr/>
           <p:nvPr/>
-        </p:nvSpPr>
-        <p:spPr>
-          <a:xfrm>
-            <a:off x="8412480" y="960120"/>
-            <a:ext cx="365760" cy="1645920"/>
-          </a:xfrm>
-          <a:prstGeom prst="rect">
+        </p:nvCxnSpPr>
+        <p:spPr>
+          <a:xfrm>
+            <a:off x="11704320" y="4526280"/>
+            <a:ext cx="0" cy="64008"/>
+          </a:xfrm>
+          <a:prstGeom prst="line">
             <a:avLst/>
           </a:prstGeom>
-          <a:solidFill>
-            <a:srgbClr val="213E4B"/>
-          </a:solidFill>
-          <a:ln w="19050">
+          <a:ln w="12700">
             <a:solidFill>
               <a:srgbClr val="B4C7D2"/>
             </a:solidFill>
           </a:ln>
           <a:effectLst/>
         </p:spPr>
-        <p:txBody>
-          <a:bodyPr rtlCol="0" anchor="ctr"/>
-          <a:lstStyle/>
-          <a:p>
-            <a:pPr algn="ctr"/>
-          </a:p>
-        </p:txBody>
-      </p:sp>
+      </p:cxnSp>
       <p:cxnSp>
         <p:nvCxnSpPr>
-          <p:cNvPr id="11" name="C3-E33 arrow 9" descr="sci-ppt:o009"/>
+          <p:cNvPr id="12" name="C3-E33 line 10" descr="sci-ppt:o010"/>
           <p:cNvCxnSpPr/>
           <p:nvPr/>
         </p:nvCxnSpPr>
         <p:spPr>
           <a:xfrm>
-            <a:off x="5760720" y="1874519"/>
-            <a:ext cx="2606040" cy="0"/>
+            <a:off x="11704320" y="1783080"/>
+            <a:ext cx="0" cy="2743200"/>
           </a:xfrm>
           <a:prstGeom prst="line">
             <a:avLst/>
           </a:prstGeom>
-          <a:ln w="25400">
+          <a:ln w="7620">
             <a:solidFill>
-              <a:srgbClr val="8EDBD4"/>
+              <a:srgbClr val="2E4756"/>
             </a:solidFill>
-            <a:headEnd type="none" w="med" len="med"/>
-            <a:tailEnd type="triangle" w="med" len="med"/>
           </a:ln>
           <a:effectLst/>
         </p:spPr>
       </p:cxnSp>
       <p:sp>
         <p:nvSpPr>
-          <p:cNvPr id="12" name="C3-E33 text 10" descr="sci-ppt:o010"/>
+          <p:cNvPr id="13" name="C3-E33 text 11" descr="sci-ppt:o011"/>
           <p:cNvSpPr txBox="1"/>
           <p:nvPr/>
         </p:nvSpPr>
         <p:spPr>
           <a:xfrm>
-            <a:off x="9006840" y="1005840"/>
-            <a:ext cx="2743200" cy="548640"/>
+            <a:off x="11247120" y="4608576"/>
+            <a:ext cx="914400" cy="208407"/>
           </a:xfrm>
           <a:prstGeom prst="rect">
             <a:avLst/>
@@ -3430,96 +3410,24 @@
           <a:effectLst/>
         </p:spPr>
         <p:txBody>
-          <a:bodyPr wrap="square" lIns="27432" rIns="27432" tIns="18288" bIns="18288" anchor="ctr">
+          <a:bodyPr wrap="none" lIns="18288" rIns="18288" tIns="18288" bIns="18288" anchor="t">
             <a:spAutoFit/>
           </a:bodyPr>
           <a:lstStyle/>
           <a:p>
-            <a:pPr algn="l">
+            <a:pPr algn="ctr">
               <a:spcAft>
                 <a:spcPts val="0"/>
               </a:spcAft>
             </a:pPr>
             <a:r>
-              <a:rPr sz="1800" b="0" i="0">
+              <a:rPr sz="1050" b="0" i="0">
                 <a:solidFill>
-                  <a:srgbClr val="E7F0F3"/>
+                  <a:srgbClr val="B4C7D2"/>
                 </a:solidFill>
                 <a:latin typeface="Arial"/>
               </a:rPr>
-              <a:t>Receiver</a:t>
-            </a:r>
-          </a:p>
-          <a:p>
-            <a:pPr algn="l">
-              <a:spcAft>
-                <a:spcPts val="0"/>
-              </a:spcAft>
-            </a:pPr>
-            <a:r>
-              <a:rPr sz="1800" b="0" i="0">
-                <a:solidFill>
-                  <a:srgbClr val="E7F0F3"/>
-                </a:solidFill>
-                <a:latin typeface="Arial"/>
-              </a:rPr>
-              <a:t>Z_r, v_i</a:t>
-            </a:r>
-          </a:p>
-        </p:txBody>
-      </p:sp>
-      <p:sp>
-        <p:nvSpPr>
-          <p:cNvPr id="13" name="C3-E33 text 11" descr="sci-ppt:o011"/>
-          <p:cNvSpPr txBox="1"/>
-          <p:nvPr/>
-        </p:nvSpPr>
-        <p:spPr>
-          <a:xfrm>
-            <a:off x="6035040" y="2880360"/>
-            <a:ext cx="5394960" cy="731520"/>
-          </a:xfrm>
-          <a:prstGeom prst="rect">
-            <a:avLst/>
-          </a:prstGeom>
-          <a:noFill/>
-          <a:effectLst/>
-        </p:spPr>
-        <p:txBody>
-          <a:bodyPr wrap="square" lIns="27432" rIns="27432" tIns="18288" bIns="18288" anchor="ctr">
-            <a:spAutoFit/>
-          </a:bodyPr>
-          <a:lstStyle/>
-          <a:p>
-            <a:pPr algn="l">
-              <a:spcAft>
-                <a:spcPts val="0"/>
-              </a:spcAft>
-            </a:pPr>
-            <a:r>
-              <a:rPr sz="1700" b="0" i="0">
-                <a:solidFill>
-                  <a:srgbClr val="8EDBD4"/>
-                </a:solidFill>
-                <a:latin typeface="Arial"/>
-              </a:rPr>
-              <a:t>Early pressure: acoustic matching</a:t>
-            </a:r>
-          </a:p>
-          <a:p>
-            <a:pPr algn="l">
-              <a:spcAft>
-                <a:spcPts val="0"/>
-              </a:spcAft>
-            </a:pPr>
-            <a:r>
-              <a:rPr sz="1700" b="0" i="0">
-                <a:solidFill>
-                  <a:srgbClr val="8EDBD4"/>
-                </a:solidFill>
-                <a:latin typeface="Arial"/>
-              </a:rPr>
-              <a:t>Impulse: finite momentum change</a:t>
+              <a:t>100</a:t>
             </a:r>
           </a:p>
         </p:txBody>
@@ -3532,30 +3440,74 @@
         </p:nvCxnSpPr>
         <p:spPr>
           <a:xfrm>
-            <a:off x="274320" y="3977639"/>
-            <a:ext cx="11612880" cy="0"/>
+            <a:off x="8622792" y="4526280"/>
+            <a:ext cx="64008" cy="0"/>
           </a:xfrm>
           <a:prstGeom prst="line">
             <a:avLst/>
           </a:prstGeom>
           <a:ln w="12700">
             <a:solidFill>
-              <a:srgbClr val="405967"/>
+              <a:srgbClr val="B4C7D2"/>
             </a:solidFill>
           </a:ln>
           <a:effectLst/>
         </p:spPr>
       </p:cxnSp>
-      <p:sp>
-        <p:nvSpPr>
-          <p:cNvPr id="15" name="C3-E33 text 13" descr="sci-ppt:o013"/>
+      <p:cxnSp>
+        <p:nvCxnSpPr>
+          <p:cNvPr id="15" name="C3-E33 line 13" descr="sci-ppt:o013"/>
+          <p:cNvCxnSpPr/>
+          <p:nvPr/>
+        </p:nvCxnSpPr>
+        <p:spPr>
+          <a:xfrm>
+            <a:off x="8622792" y="3219994"/>
+            <a:ext cx="64008" cy="0"/>
+          </a:xfrm>
+          <a:prstGeom prst="line">
+            <a:avLst/>
+          </a:prstGeom>
+          <a:ln w="12700">
+            <a:solidFill>
+              <a:srgbClr val="B4C7D2"/>
+            </a:solidFill>
+          </a:ln>
+          <a:effectLst/>
+        </p:spPr>
+      </p:cxnSp>
+      <p:cxnSp>
+        <p:nvCxnSpPr>
+          <p:cNvPr id="16" name="C3-E33 line 14" descr="sci-ppt:o014"/>
+          <p:cNvCxnSpPr/>
+          <p:nvPr/>
+        </p:nvCxnSpPr>
+        <p:spPr>
+          <a:xfrm>
+            <a:off x="8686800" y="3219994"/>
+            <a:ext cx="3017520" cy="0"/>
+          </a:xfrm>
+          <a:prstGeom prst="line">
+            <a:avLst/>
+          </a:prstGeom>
+          <a:ln w="7620">
+            <a:solidFill>
+              <a:srgbClr val="2E4756"/>
+            </a:solidFill>
+          </a:ln>
+          <a:effectLst/>
+        </p:spPr>
+      </p:cxnSp>
+      <p:sp>
+        <p:nvSpPr>
+          <p:cNvPr id="17" name="C3-E33 text 15" descr="sci-ppt:o015"/>
           <p:cNvSpPr txBox="1"/>
           <p:nvPr/>
         </p:nvSpPr>
         <p:spPr>
           <a:xfrm>
-            <a:off x="320040" y="4096512"/>
-            <a:ext cx="5715000" cy="246888"/>
+            <a:off x="7818120" y="3137698"/>
+            <a:ext cx="777240" cy="208407"/>
           </a:xfrm>
           <a:prstGeom prst="rect">
             <a:avLst/>
@@ -3564,7 +3516,171 @@
           <a:effectLst/>
         </p:spPr>
         <p:txBody>
-          <a:bodyPr wrap="square" lIns="27432" rIns="27432" tIns="18288" bIns="18288" anchor="ctr">
+          <a:bodyPr wrap="none" lIns="18288" rIns="18288" tIns="18288" bIns="18288" anchor="t">
+            <a:spAutoFit/>
+          </a:bodyPr>
+          <a:lstStyle/>
+          <a:p>
+            <a:pPr algn="r">
+              <a:spcAft>
+                <a:spcPts val="0"/>
+              </a:spcAft>
+            </a:pPr>
+            <a:r>
+              <a:rPr sz="1050" b="0" i="0">
+                <a:solidFill>
+                  <a:srgbClr val="B4C7D2"/>
+                </a:solidFill>
+                <a:latin typeface="Arial"/>
+              </a:rPr>
+              <a:t>0.5</a:t>
+            </a:r>
+          </a:p>
+        </p:txBody>
+      </p:sp>
+      <p:cxnSp>
+        <p:nvCxnSpPr>
+          <p:cNvPr id="18" name="C3-E33 line 16" descr="sci-ppt:o016"/>
+          <p:cNvCxnSpPr/>
+          <p:nvPr/>
+        </p:nvCxnSpPr>
+        <p:spPr>
+          <a:xfrm>
+            <a:off x="8622792" y="1913708"/>
+            <a:ext cx="64008" cy="0"/>
+          </a:xfrm>
+          <a:prstGeom prst="line">
+            <a:avLst/>
+          </a:prstGeom>
+          <a:ln w="12700">
+            <a:solidFill>
+              <a:srgbClr val="B4C7D2"/>
+            </a:solidFill>
+          </a:ln>
+          <a:effectLst/>
+        </p:spPr>
+      </p:cxnSp>
+      <p:cxnSp>
+        <p:nvCxnSpPr>
+          <p:cNvPr id="19" name="C3-E33 line 17" descr="sci-ppt:o017"/>
+          <p:cNvCxnSpPr/>
+          <p:nvPr/>
+        </p:nvCxnSpPr>
+        <p:spPr>
+          <a:xfrm>
+            <a:off x="8686800" y="1913708"/>
+            <a:ext cx="3017520" cy="0"/>
+          </a:xfrm>
+          <a:prstGeom prst="line">
+            <a:avLst/>
+          </a:prstGeom>
+          <a:ln w="7620">
+            <a:solidFill>
+              <a:srgbClr val="2E4756"/>
+            </a:solidFill>
+          </a:ln>
+          <a:effectLst/>
+        </p:spPr>
+      </p:cxnSp>
+      <p:sp>
+        <p:nvSpPr>
+          <p:cNvPr id="20" name="C3-E33 text 18" descr="sci-ppt:o018"/>
+          <p:cNvSpPr txBox="1"/>
+          <p:nvPr/>
+        </p:nvSpPr>
+        <p:spPr>
+          <a:xfrm>
+            <a:off x="7818120" y="1831412"/>
+            <a:ext cx="777240" cy="208407"/>
+          </a:xfrm>
+          <a:prstGeom prst="rect">
+            <a:avLst/>
+          </a:prstGeom>
+          <a:noFill/>
+          <a:effectLst/>
+        </p:spPr>
+        <p:txBody>
+          <a:bodyPr wrap="none" lIns="18288" rIns="18288" tIns="18288" bIns="18288" anchor="t">
+            <a:spAutoFit/>
+          </a:bodyPr>
+          <a:lstStyle/>
+          <a:p>
+            <a:pPr algn="r">
+              <a:spcAft>
+                <a:spcPts val="0"/>
+              </a:spcAft>
+            </a:pPr>
+            <a:r>
+              <a:rPr sz="1050" b="0" i="0">
+                <a:solidFill>
+                  <a:srgbClr val="B4C7D2"/>
+                </a:solidFill>
+                <a:latin typeface="Arial"/>
+              </a:rPr>
+              <a:t>1.0</a:t>
+            </a:r>
+          </a:p>
+        </p:txBody>
+      </p:sp>
+      <p:sp>
+        <p:nvSpPr>
+          <p:cNvPr id="21" name="C3-E33 text 19" descr="sci-ppt:o019"/>
+          <p:cNvSpPr txBox="1"/>
+          <p:nvPr/>
+        </p:nvSpPr>
+        <p:spPr>
+          <a:xfrm>
+            <a:off x="8686800" y="4809744"/>
+            <a:ext cx="3017520" cy="231648"/>
+          </a:xfrm>
+          <a:prstGeom prst="rect">
+            <a:avLst/>
+          </a:prstGeom>
+          <a:noFill/>
+          <a:effectLst/>
+        </p:spPr>
+        <p:txBody>
+          <a:bodyPr wrap="none" lIns="18288" rIns="18288" tIns="18288" bIns="18288" anchor="t">
+            <a:spAutoFit/>
+          </a:bodyPr>
+          <a:lstStyle/>
+          <a:p>
+            <a:pPr algn="ctr">
+              <a:spcAft>
+                <a:spcPts val="0"/>
+              </a:spcAft>
+            </a:pPr>
+            <a:r>
+              <a:rPr sz="1200" b="0" i="0">
+                <a:solidFill>
+                  <a:srgbClr val="E7F0F3"/>
+                </a:solidFill>
+                <a:latin typeface="Arial"/>
+              </a:rPr>
+              <a:t>Zᵣ / Zₗ</a:t>
+            </a:r>
+          </a:p>
+        </p:txBody>
+      </p:sp>
+      <p:sp>
+        <p:nvSpPr>
+          <p:cNvPr id="22" name="C3-E33 text 20" descr="sci-ppt:o020"/>
+          <p:cNvSpPr txBox="1"/>
+          <p:nvPr/>
+        </p:nvSpPr>
+        <p:spPr>
+          <a:xfrm>
+            <a:off x="8138160" y="1435607"/>
+            <a:ext cx="3017520" cy="231648"/>
+          </a:xfrm>
+          <a:prstGeom prst="rect">
+            <a:avLst/>
+          </a:prstGeom>
+          <a:noFill/>
+          <a:effectLst/>
+        </p:spPr>
+        <p:txBody>
+          <a:bodyPr wrap="none" lIns="18288" rIns="18288" tIns="18288" bIns="18288" anchor="t">
             <a:spAutoFit/>
           </a:bodyPr>
           <a:lstStyle/>
@@ -3575,27 +3691,365 @@
               </a:spcAft>
             </a:pPr>
             <a:r>
-              <a:rPr sz="1150" b="0" i="0">
+              <a:rPr sz="1200" b="0" i="0">
                 <a:solidFill>
-                  <a:srgbClr val="B4C7D2"/>
+                  <a:srgbClr val="E7F0F3"/>
                 </a:solidFill>
                 <a:latin typeface="Arial"/>
               </a:rPr>
-              <a:t>• U_j, L_j finite incoming jet</a:t>
-            </a:r>
-          </a:p>
-        </p:txBody>
-      </p:sp>
-      <p:sp>
-        <p:nvSpPr>
-          <p:cNvPr id="16" name="C3-E33 text 14" descr="sci-ppt:o014"/>
+              <a:t>p/ρcU</a:t>
+            </a:r>
+          </a:p>
+        </p:txBody>
+      </p:sp>
+      <p:sp>
+        <p:nvSpPr>
+          <p:cNvPr id="23" name="C3-E33 polygon 21" descr="sci-ppt:o021"/>
+          <p:cNvSpPr/>
+          <p:nvPr/>
+        </p:nvSpPr>
+        <p:spPr>
+          <a:xfrm>
+            <a:off x="8686800" y="1939575"/>
+            <a:ext cx="3017520" cy="2560837"/>
+          </a:xfrm>
+          <a:custGeom>
+            <a:avLst/>
+            <a:gdLst/>
+            <a:ahLst/>
+            <a:cxnLst/>
+            <a:rect l="l" t="t" r="r" b="b"/>
+            <a:pathLst>
+              <a:path w="3017520" h="2560837">
+                <a:moveTo>
+                  <a:pt x="0" y="2560837"/>
+                </a:moveTo>
+                <a:lnTo>
+                  <a:pt x="30480" y="2558343"/>
+                </a:lnTo>
+                <a:lnTo>
+                  <a:pt x="60960" y="2555611"/>
+                </a:lnTo>
+                <a:lnTo>
+                  <a:pt x="91440" y="2552618"/>
+                </a:lnTo>
+                <a:lnTo>
+                  <a:pt x="121920" y="2549343"/>
+                </a:lnTo>
+                <a:lnTo>
+                  <a:pt x="152400" y="2545757"/>
+                </a:lnTo>
+                <a:lnTo>
+                  <a:pt x="182880" y="2541833"/>
+                </a:lnTo>
+                <a:lnTo>
+                  <a:pt x="213360" y="2537541"/>
+                </a:lnTo>
+                <a:lnTo>
+                  <a:pt x="243840" y="2532846"/>
+                </a:lnTo>
+                <a:lnTo>
+                  <a:pt x="274320" y="2527713"/>
+                </a:lnTo>
+                <a:lnTo>
+                  <a:pt x="304800" y="2522104"/>
+                </a:lnTo>
+                <a:lnTo>
+                  <a:pt x="335280" y="2515976"/>
+                </a:lnTo>
+                <a:lnTo>
+                  <a:pt x="365760" y="2509285"/>
+                </a:lnTo>
+                <a:lnTo>
+                  <a:pt x="396240" y="2501981"/>
+                </a:lnTo>
+                <a:lnTo>
+                  <a:pt x="426720" y="2494014"/>
+                </a:lnTo>
+                <a:lnTo>
+                  <a:pt x="457200" y="2485327"/>
+                </a:lnTo>
+                <a:lnTo>
+                  <a:pt x="487680" y="2475862"/>
+                </a:lnTo>
+                <a:lnTo>
+                  <a:pt x="518160" y="2465557"/>
+                </a:lnTo>
+                <a:lnTo>
+                  <a:pt x="548640" y="2454343"/>
+                </a:lnTo>
+                <a:lnTo>
+                  <a:pt x="579120" y="2442152"/>
+                </a:lnTo>
+                <a:lnTo>
+                  <a:pt x="609600" y="2428910"/>
+                </a:lnTo>
+                <a:lnTo>
+                  <a:pt x="640080" y="2414539"/>
+                </a:lnTo>
+                <a:lnTo>
+                  <a:pt x="670560" y="2398959"/>
+                </a:lnTo>
+                <a:lnTo>
+                  <a:pt x="701040" y="2382088"/>
+                </a:lnTo>
+                <a:lnTo>
+                  <a:pt x="731520" y="2363840"/>
+                </a:lnTo>
+                <a:lnTo>
+                  <a:pt x="762000" y="2344128"/>
+                </a:lnTo>
+                <a:lnTo>
+                  <a:pt x="792480" y="2322866"/>
+                </a:lnTo>
+                <a:lnTo>
+                  <a:pt x="822960" y="2299965"/>
+                </a:lnTo>
+                <a:lnTo>
+                  <a:pt x="853440" y="2275340"/>
+                </a:lnTo>
+                <a:lnTo>
+                  <a:pt x="883920" y="2248908"/>
+                </a:lnTo>
+                <a:lnTo>
+                  <a:pt x="914400" y="2220588"/>
+                </a:lnTo>
+                <a:lnTo>
+                  <a:pt x="944880" y="2190308"/>
+                </a:lnTo>
+                <a:lnTo>
+                  <a:pt x="975360" y="2158002"/>
+                </a:lnTo>
+                <a:lnTo>
+                  <a:pt x="1005840" y="2123613"/>
+                </a:lnTo>
+                <a:lnTo>
+                  <a:pt x="1036320" y="2087097"/>
+                </a:lnTo>
+                <a:lnTo>
+                  <a:pt x="1066800" y="2048422"/>
+                </a:lnTo>
+                <a:lnTo>
+                  <a:pt x="1097280" y="2007573"/>
+                </a:lnTo>
+                <a:lnTo>
+                  <a:pt x="1127760" y="1964555"/>
+                </a:lnTo>
+                <a:lnTo>
+                  <a:pt x="1158240" y="1919390"/>
+                </a:lnTo>
+                <a:lnTo>
+                  <a:pt x="1188720" y="1872123"/>
+                </a:lnTo>
+                <a:lnTo>
+                  <a:pt x="1219200" y="1822823"/>
+                </a:lnTo>
+                <a:lnTo>
+                  <a:pt x="1249680" y="1771583"/>
+                </a:lnTo>
+                <a:lnTo>
+                  <a:pt x="1280160" y="1718519"/>
+                </a:lnTo>
+                <a:lnTo>
+                  <a:pt x="1310640" y="1663775"/>
+                </a:lnTo>
+                <a:lnTo>
+                  <a:pt x="1341120" y="1607517"/>
+                </a:lnTo>
+                <a:lnTo>
+                  <a:pt x="1371600" y="1549933"/>
+                </a:lnTo>
+                <a:lnTo>
+                  <a:pt x="1402080" y="1491235"/>
+                </a:lnTo>
+                <a:lnTo>
+                  <a:pt x="1432560" y="1431648"/>
+                </a:lnTo>
+                <a:lnTo>
+                  <a:pt x="1463040" y="1371418"/>
+                </a:lnTo>
+                <a:lnTo>
+                  <a:pt x="1493520" y="1310795"/>
+                </a:lnTo>
+                <a:lnTo>
+                  <a:pt x="1524000" y="1250042"/>
+                </a:lnTo>
+                <a:lnTo>
+                  <a:pt x="1554480" y="1189420"/>
+                </a:lnTo>
+                <a:lnTo>
+                  <a:pt x="1584960" y="1129189"/>
+                </a:lnTo>
+                <a:lnTo>
+                  <a:pt x="1615440" y="1069603"/>
+                </a:lnTo>
+                <a:lnTo>
+                  <a:pt x="1645920" y="1010904"/>
+                </a:lnTo>
+                <a:lnTo>
+                  <a:pt x="1676400" y="953321"/>
+                </a:lnTo>
+                <a:lnTo>
+                  <a:pt x="1706880" y="897062"/>
+                </a:lnTo>
+                <a:lnTo>
+                  <a:pt x="1737360" y="842318"/>
+                </a:lnTo>
+                <a:lnTo>
+                  <a:pt x="1767840" y="789255"/>
+                </a:lnTo>
+                <a:lnTo>
+                  <a:pt x="1798320" y="738014"/>
+                </a:lnTo>
+                <a:lnTo>
+                  <a:pt x="1828800" y="688714"/>
+                </a:lnTo>
+                <a:lnTo>
+                  <a:pt x="1859280" y="641448"/>
+                </a:lnTo>
+                <a:lnTo>
+                  <a:pt x="1889760" y="596282"/>
+                </a:lnTo>
+                <a:lnTo>
+                  <a:pt x="1920240" y="553264"/>
+                </a:lnTo>
+                <a:lnTo>
+                  <a:pt x="1950720" y="512416"/>
+                </a:lnTo>
+                <a:lnTo>
+                  <a:pt x="1981200" y="473741"/>
+                </a:lnTo>
+                <a:lnTo>
+                  <a:pt x="2011680" y="437224"/>
+                </a:lnTo>
+                <a:lnTo>
+                  <a:pt x="2042160" y="402835"/>
+                </a:lnTo>
+                <a:lnTo>
+                  <a:pt x="2072640" y="370529"/>
+                </a:lnTo>
+                <a:lnTo>
+                  <a:pt x="2103120" y="340249"/>
+                </a:lnTo>
+                <a:lnTo>
+                  <a:pt x="2133600" y="311930"/>
+                </a:lnTo>
+                <a:lnTo>
+                  <a:pt x="2164080" y="285497"/>
+                </a:lnTo>
+                <a:lnTo>
+                  <a:pt x="2194560" y="260873"/>
+                </a:lnTo>
+                <a:lnTo>
+                  <a:pt x="2225040" y="237972"/>
+                </a:lnTo>
+                <a:lnTo>
+                  <a:pt x="2255520" y="216709"/>
+                </a:lnTo>
+                <a:lnTo>
+                  <a:pt x="2286000" y="196998"/>
+                </a:lnTo>
+                <a:lnTo>
+                  <a:pt x="2316480" y="178750"/>
+                </a:lnTo>
+                <a:lnTo>
+                  <a:pt x="2346960" y="161879"/>
+                </a:lnTo>
+                <a:lnTo>
+                  <a:pt x="2377440" y="146299"/>
+                </a:lnTo>
+                <a:lnTo>
+                  <a:pt x="2407920" y="131928"/>
+                </a:lnTo>
+                <a:lnTo>
+                  <a:pt x="2438400" y="118685"/>
+                </a:lnTo>
+                <a:lnTo>
+                  <a:pt x="2468880" y="106494"/>
+                </a:lnTo>
+                <a:lnTo>
+                  <a:pt x="2499360" y="95281"/>
+                </a:lnTo>
+                <a:lnTo>
+                  <a:pt x="2529840" y="84975"/>
+                </a:lnTo>
+                <a:lnTo>
+                  <a:pt x="2560320" y="75510"/>
+                </a:lnTo>
+                <a:lnTo>
+                  <a:pt x="2590800" y="66824"/>
+                </a:lnTo>
+                <a:lnTo>
+                  <a:pt x="2621280" y="58856"/>
+                </a:lnTo>
+                <a:lnTo>
+                  <a:pt x="2651760" y="51553"/>
+                </a:lnTo>
+                <a:lnTo>
+                  <a:pt x="2682240" y="44861"/>
+                </a:lnTo>
+                <a:lnTo>
+                  <a:pt x="2712720" y="38733"/>
+                </a:lnTo>
+                <a:lnTo>
+                  <a:pt x="2743200" y="33124"/>
+                </a:lnTo>
+                <a:lnTo>
+                  <a:pt x="2773680" y="27992"/>
+                </a:lnTo>
+                <a:lnTo>
+                  <a:pt x="2804160" y="23297"/>
+                </a:lnTo>
+                <a:lnTo>
+                  <a:pt x="2834640" y="19004"/>
+                </a:lnTo>
+                <a:lnTo>
+                  <a:pt x="2865120" y="15081"/>
+                </a:lnTo>
+                <a:lnTo>
+                  <a:pt x="2895600" y="11495"/>
+                </a:lnTo>
+                <a:lnTo>
+                  <a:pt x="2926080" y="8219"/>
+                </a:lnTo>
+                <a:lnTo>
+                  <a:pt x="2956560" y="5227"/>
+                </a:lnTo>
+                <a:lnTo>
+                  <a:pt x="2987040" y="2495"/>
+                </a:lnTo>
+                <a:lnTo>
+                  <a:pt x="3017520" y="0"/>
+                </a:lnTo>
+              </a:path>
+            </a:pathLst>
+          </a:custGeom>
+          <a:noFill/>
+          <a:ln w="38100">
+            <a:solidFill>
+              <a:srgbClr val="8EDBD4"/>
+            </a:solidFill>
+          </a:ln>
+          <a:effectLst/>
+        </p:spPr>
+        <p:txBody>
+          <a:bodyPr rtlCol="0" anchor="ctr"/>
+          <a:lstStyle/>
+          <a:p>
+            <a:pPr algn="ctr"/>
+          </a:p>
+        </p:txBody>
+      </p:sp>
+      <p:sp>
+        <p:nvSpPr>
+          <p:cNvPr id="24" name="C3-E33 text 22" descr="sci-ppt:o022"/>
           <p:cNvSpPr txBox="1"/>
           <p:nvPr/>
         </p:nvSpPr>
         <p:spPr>
           <a:xfrm>
-            <a:off x="6217920" y="4096512"/>
-            <a:ext cx="5715000" cy="246888"/>
+            <a:off x="7680960" y="960120"/>
+            <a:ext cx="4023360" cy="247142"/>
           </a:xfrm>
           <a:prstGeom prst="rect">
             <a:avLst/>
@@ -3604,7 +4058,7 @@
           <a:effectLst/>
         </p:spPr>
         <p:txBody>
-          <a:bodyPr wrap="square" lIns="27432" rIns="27432" tIns="18288" bIns="18288" anchor="ctr">
+          <a:bodyPr wrap="none" lIns="18288" rIns="18288" tIns="18288" bIns="18288" anchor="t">
             <a:spAutoFit/>
           </a:bodyPr>
           <a:lstStyle/>
@@ -3615,27 +4069,59 @@
               </a:spcAft>
             </a:pPr>
             <a:r>
-              <a:rPr sz="1150" b="0" i="0">
+              <a:rPr sz="1300" b="1" i="0">
                 <a:solidFill>
-                  <a:srgbClr val="B4C7D2"/>
+                  <a:srgbClr val="8EDBD4"/>
                 </a:solidFill>
                 <a:latin typeface="Arial"/>
               </a:rPr>
-              <a:t>• ρ, c; Z_l liquid impedance</a:t>
-            </a:r>
-          </a:p>
-        </p:txBody>
-      </p:sp>
-      <p:sp>
-        <p:nvSpPr>
-          <p:cNvPr id="17" name="C3-E33 text 15" descr="sci-ppt:o015"/>
+              <a:t>Contact pressure fraction</a:t>
+            </a:r>
+          </a:p>
+        </p:txBody>
+      </p:sp>
+      <p:sp>
+        <p:nvSpPr>
+          <p:cNvPr id="25" name="C3-E33 round_rect 23" descr="sci-ppt:o023"/>
+          <p:cNvSpPr/>
+          <p:nvPr/>
+        </p:nvSpPr>
+        <p:spPr>
+          <a:xfrm>
+            <a:off x="365760" y="914400"/>
+            <a:ext cx="7040880" cy="1417320"/>
+          </a:xfrm>
+          <a:prstGeom prst="roundRect">
+            <a:avLst/>
+          </a:prstGeom>
+          <a:solidFill>
+            <a:srgbClr val="213E4B"/>
+          </a:solidFill>
+          <a:ln w="20320">
+            <a:solidFill>
+              <a:srgbClr val="8EDBD4"/>
+            </a:solidFill>
+          </a:ln>
+          <a:effectLst/>
+        </p:spPr>
+        <p:txBody>
+          <a:bodyPr rtlCol="0" anchor="ctr"/>
+          <a:lstStyle/>
+          <a:p>
+            <a:pPr algn="ctr"/>
+          </a:p>
+        </p:txBody>
+      </p:sp>
+      <p:sp>
+        <p:nvSpPr>
+          <p:cNvPr id="26" name="C3-E33 text 24" descr="sci-ppt:o024"/>
           <p:cNvSpPr txBox="1"/>
           <p:nvPr/>
         </p:nvSpPr>
         <p:spPr>
           <a:xfrm>
-            <a:off x="320040" y="4329684"/>
-            <a:ext cx="5715000" cy="246888"/>
+            <a:off x="475488" y="969264"/>
+            <a:ext cx="6821424" cy="254889"/>
           </a:xfrm>
           <a:prstGeom prst="rect">
             <a:avLst/>
@@ -3644,7 +4130,7 @@
           <a:effectLst/>
         </p:spPr>
         <p:txBody>
-          <a:bodyPr wrap="square" lIns="27432" rIns="27432" tIns="18288" bIns="18288" anchor="ctr">
+          <a:bodyPr wrap="none" lIns="18288" rIns="18288" tIns="18288" bIns="18288" anchor="t">
             <a:spAutoFit/>
           </a:bodyPr>
           <a:lstStyle/>
@@ -3655,27 +4141,27 @@
               </a:spcAft>
             </a:pPr>
             <a:r>
-              <a:rPr sz="1150" b="0" i="0">
+              <a:rPr sz="1350" b="1" i="0">
                 <a:solidFill>
-                  <a:srgbClr val="B4C7D2"/>
+                  <a:srgbClr val="8EDBD4"/>
                 </a:solidFill>
                 <a:latin typeface="Arial"/>
               </a:rPr>
-              <a:t>• Z_r receiver impedance</a:t>
-            </a:r>
-          </a:p>
-        </p:txBody>
-      </p:sp>
-      <p:sp>
-        <p:nvSpPr>
-          <p:cNvPr id="18" name="C3-E33 text 16" descr="sci-ppt:o016"/>
+              <a:t>Early contact</a:t>
+            </a:r>
+          </a:p>
+        </p:txBody>
+      </p:sp>
+      <p:sp>
+        <p:nvSpPr>
+          <p:cNvPr id="27" name="C3-E33 text 25" descr="sci-ppt:o025"/>
           <p:cNvSpPr txBox="1"/>
           <p:nvPr/>
         </p:nvSpPr>
         <p:spPr>
           <a:xfrm>
-            <a:off x="6217920" y="4329684"/>
-            <a:ext cx="5715000" cy="246888"/>
+            <a:off x="502920" y="1325880"/>
+            <a:ext cx="6766560" cy="262636"/>
           </a:xfrm>
           <a:prstGeom prst="rect">
             <a:avLst/>
@@ -3684,7 +4170,7 @@
           <a:effectLst/>
         </p:spPr>
         <p:txBody>
-          <a:bodyPr wrap="square" lIns="27432" rIns="27432" tIns="18288" bIns="18288" anchor="ctr">
+          <a:bodyPr wrap="none" lIns="18288" rIns="18288" tIns="18288" bIns="18288" anchor="t">
             <a:spAutoFit/>
           </a:bodyPr>
           <a:lstStyle/>
@@ -3695,27 +4181,59 @@
               </a:spcAft>
             </a:pPr>
             <a:r>
-              <a:rPr sz="1150" b="0" i="0">
+              <a:rPr sz="1400" b="1" i="0">
                 <a:solidFill>
-                  <a:srgbClr val="B4C7D2"/>
+                  <a:srgbClr val="E7F0F3"/>
                 </a:solidFill>
                 <a:latin typeface="Arial"/>
               </a:rPr>
-              <a:t>• p_early early contact scale</a:t>
-            </a:r>
-          </a:p>
-        </p:txBody>
-      </p:sp>
-      <p:sp>
-        <p:nvSpPr>
-          <p:cNvPr id="19" name="C3-E33 text 17" descr="sci-ppt:o017"/>
+              <a:t>p_early ≃ Zₗ Zᵣ Uⱼ / (Zₗ + Zᵣ),   Zₗ = ρc</a:t>
+            </a:r>
+          </a:p>
+        </p:txBody>
+      </p:sp>
+      <p:sp>
+        <p:nvSpPr>
+          <p:cNvPr id="28" name="C3-E33 round_rect 26" descr="sci-ppt:o026"/>
+          <p:cNvSpPr/>
+          <p:nvPr/>
+        </p:nvSpPr>
+        <p:spPr>
+          <a:xfrm>
+            <a:off x="365760" y="2468880"/>
+            <a:ext cx="7040880" cy="1417320"/>
+          </a:xfrm>
+          <a:prstGeom prst="roundRect">
+            <a:avLst/>
+          </a:prstGeom>
+          <a:solidFill>
+            <a:srgbClr val="213E4B"/>
+          </a:solidFill>
+          <a:ln w="20320">
+            <a:solidFill>
+              <a:srgbClr val="F2B880"/>
+            </a:solidFill>
+          </a:ln>
+          <a:effectLst/>
+        </p:spPr>
+        <p:txBody>
+          <a:bodyPr rtlCol="0" anchor="ctr"/>
+          <a:lstStyle/>
+          <a:p>
+            <a:pPr algn="ctr"/>
+          </a:p>
+        </p:txBody>
+      </p:sp>
+      <p:sp>
+        <p:nvSpPr>
+          <p:cNvPr id="29" name="C3-E33 text 27" descr="sci-ppt:o027"/>
           <p:cNvSpPr txBox="1"/>
           <p:nvPr/>
         </p:nvSpPr>
         <p:spPr>
           <a:xfrm>
-            <a:off x="320040" y="4562856"/>
-            <a:ext cx="5715000" cy="246888"/>
+            <a:off x="475488" y="2523744"/>
+            <a:ext cx="6821424" cy="254889"/>
           </a:xfrm>
           <a:prstGeom prst="rect">
             <a:avLst/>
@@ -3724,7 +4242,7 @@
           <a:effectLst/>
         </p:spPr>
         <p:txBody>
-          <a:bodyPr wrap="square" lIns="27432" rIns="27432" tIns="18288" bIns="18288" anchor="ctr">
+          <a:bodyPr wrap="none" lIns="18288" rIns="18288" tIns="18288" bIns="18288" anchor="t">
             <a:spAutoFit/>
           </a:bodyPr>
           <a:lstStyle/>
@@ -3735,27 +4253,27 @@
               </a:spcAft>
             </a:pPr>
             <a:r>
-              <a:rPr sz="1150" b="0" i="0">
+              <a:rPr sz="1350" b="1" i="0">
                 <a:solidFill>
-                  <a:srgbClr val="B4C7D2"/>
+                  <a:srgbClr val="F2B880"/>
                 </a:solidFill>
                 <a:latin typeface="Arial"/>
               </a:rPr>
-              <a:t>• τ_eq = L_j/c</a:t>
-            </a:r>
-          </a:p>
-        </p:txBody>
-      </p:sp>
-      <p:sp>
-        <p:nvSpPr>
-          <p:cNvPr id="20" name="C3-E33 text 18" descr="sci-ppt:o018"/>
+              <a:t>Duration</a:t>
+            </a:r>
+          </a:p>
+        </p:txBody>
+      </p:sp>
+      <p:sp>
+        <p:nvSpPr>
+          <p:cNvPr id="30" name="C3-E33 text 28" descr="sci-ppt:o028"/>
           <p:cNvSpPr txBox="1"/>
           <p:nvPr/>
         </p:nvSpPr>
         <p:spPr>
           <a:xfrm>
-            <a:off x="6217920" y="4562856"/>
-            <a:ext cx="5715000" cy="246888"/>
+            <a:off x="502920" y="2880360"/>
+            <a:ext cx="6766560" cy="262636"/>
           </a:xfrm>
           <a:prstGeom prst="rect">
             <a:avLst/>
@@ -3764,7 +4282,7 @@
           <a:effectLst/>
         </p:spPr>
         <p:txBody>
-          <a:bodyPr wrap="square" lIns="27432" rIns="27432" tIns="18288" bIns="18288" anchor="ctr">
+          <a:bodyPr wrap="none" lIns="18288" rIns="18288" tIns="18288" bIns="18288" anchor="t">
             <a:spAutoFit/>
           </a:bodyPr>
           <a:lstStyle/>
@@ -3775,27 +4293,59 @@
               </a:spcAft>
             </a:pPr>
             <a:r>
-              <a:rPr sz="1150" b="0" i="0">
+              <a:rPr sz="1400" b="1" i="0">
                 <a:solidFill>
-                  <a:srgbClr val="B4C7D2"/>
+                  <a:srgbClr val="E7F0F3"/>
                 </a:solidFill>
                 <a:latin typeface="Arial"/>
               </a:rPr>
-              <a:t>• A_o, τ_o finite observer</a:t>
-            </a:r>
-          </a:p>
-        </p:txBody>
-      </p:sp>
-      <p:sp>
-        <p:nvSpPr>
-          <p:cNvPr id="21" name="C3-E33 text 19" descr="sci-ppt:o019"/>
+              <a:t>τ_eq = Lⱼ / c</a:t>
+            </a:r>
+          </a:p>
+        </p:txBody>
+      </p:sp>
+      <p:sp>
+        <p:nvSpPr>
+          <p:cNvPr id="31" name="C3-E33 round_rect 29" descr="sci-ppt:o029"/>
+          <p:cNvSpPr/>
+          <p:nvPr/>
+        </p:nvSpPr>
+        <p:spPr>
+          <a:xfrm>
+            <a:off x="365760" y="4023360"/>
+            <a:ext cx="7040880" cy="1737360"/>
+          </a:xfrm>
+          <a:prstGeom prst="roundRect">
+            <a:avLst/>
+          </a:prstGeom>
+          <a:solidFill>
+            <a:srgbClr val="213E4B"/>
+          </a:solidFill>
+          <a:ln w="20320">
+            <a:solidFill>
+              <a:srgbClr val="F28BA0"/>
+            </a:solidFill>
+          </a:ln>
+          <a:effectLst/>
+        </p:spPr>
+        <p:txBody>
+          <a:bodyPr rtlCol="0" anchor="ctr"/>
+          <a:lstStyle/>
+          <a:p>
+            <a:pPr algn="ctr"/>
+          </a:p>
+        </p:txBody>
+      </p:sp>
+      <p:sp>
+        <p:nvSpPr>
+          <p:cNvPr id="32" name="C3-E33 text 30" descr="sci-ppt:o030"/>
           <p:cNvSpPr txBox="1"/>
           <p:nvPr/>
         </p:nvSpPr>
         <p:spPr>
           <a:xfrm>
-            <a:off x="320040" y="4796028"/>
-            <a:ext cx="5715000" cy="246888"/>
+            <a:off x="475488" y="4078224"/>
+            <a:ext cx="6821424" cy="254889"/>
           </a:xfrm>
           <a:prstGeom prst="rect">
             <a:avLst/>
@@ -3804,7 +4354,7 @@
           <a:effectLst/>
         </p:spPr>
         <p:txBody>
-          <a:bodyPr wrap="square" lIns="27432" rIns="27432" tIns="18288" bIns="18288" anchor="ctr">
+          <a:bodyPr wrap="none" lIns="18288" rIns="18288" tIns="18288" bIns="18288" anchor="t">
             <a:spAutoFit/>
           </a:bodyPr>
           <a:lstStyle/>
@@ -3815,27 +4365,27 @@
               </a:spcAft>
             </a:pPr>
             <a:r>
-              <a:rPr sz="1150" b="0" i="0">
+              <a:rPr sz="1350" b="1" i="0">
                 <a:solidFill>
-                  <a:srgbClr val="B4C7D2"/>
+                  <a:srgbClr val="F28BA0"/>
                 </a:solidFill>
                 <a:latin typeface="Arial"/>
               </a:rPr>
-              <a:t>• p(x,ξ), p_ref, p_obs(t), dA</a:t>
-            </a:r>
-          </a:p>
-        </p:txBody>
-      </p:sp>
-      <p:sp>
-        <p:nvSpPr>
-          <p:cNvPr id="22" name="C3-E33 text 20" descr="sci-ppt:o020"/>
+              <a:t>Observer</a:t>
+            </a:r>
+          </a:p>
+        </p:txBody>
+      </p:sp>
+      <p:sp>
+        <p:nvSpPr>
+          <p:cNvPr id="33" name="C3-E33 text 31" descr="sci-ppt:o031"/>
           <p:cNvSpPr txBox="1"/>
           <p:nvPr/>
         </p:nvSpPr>
         <p:spPr>
           <a:xfrm>
-            <a:off x="320040" y="5596128"/>
-            <a:ext cx="11430000" cy="292608"/>
+            <a:off x="502920" y="4434840"/>
+            <a:ext cx="6766560" cy="254889"/>
           </a:xfrm>
           <a:prstGeom prst="rect">
             <a:avLst/>
@@ -3844,7 +4394,7 @@
           <a:effectLst/>
         </p:spPr>
         <p:txBody>
-          <a:bodyPr wrap="square" lIns="27432" rIns="27432" tIns="18288" bIns="18288" anchor="ctr">
+          <a:bodyPr wrap="none" lIns="18288" rIns="18288" tIns="18288" bIns="18288" anchor="t">
             <a:spAutoFit/>
           </a:bodyPr>
           <a:lstStyle/>
@@ -3855,27 +4405,27 @@
               </a:spcAft>
             </a:pPr>
             <a:r>
-              <a:rPr sz="1150" b="0" i="0">
+              <a:rPr sz="1350" b="1" i="0">
                 <a:solidFill>
-                  <a:srgbClr val="8EDBD4"/>
+                  <a:srgbClr val="E7F0F3"/>
                 </a:solidFill>
                 <a:latin typeface="Arial"/>
               </a:rPr>
-              <a:t>Location, footprint and time window must stay fixed</a:t>
-            </a:r>
-          </a:p>
-        </p:txBody>
-      </p:sp>
-      <p:sp>
-        <p:nvSpPr>
-          <p:cNvPr id="23" name="C3-E33 text 21" descr="sci-ppt:o021"/>
+              <a:t>p_obs(t) = (1/A_oτₒ) ∫∫ (p − p_ref) dA dξ</a:t>
+            </a:r>
+          </a:p>
+        </p:txBody>
+      </p:sp>
+      <p:sp>
+        <p:nvSpPr>
+          <p:cNvPr id="34" name="C3-E33 text 32" descr="sci-ppt:o032"/>
           <p:cNvSpPr txBox="1"/>
           <p:nvPr/>
         </p:nvSpPr>
         <p:spPr>
           <a:xfrm>
-            <a:off x="320040" y="5870448"/>
-            <a:ext cx="11430000" cy="292608"/>
+            <a:off x="7680960" y="5074920"/>
+            <a:ext cx="4114800" cy="433070"/>
           </a:xfrm>
           <a:prstGeom prst="rect">
             <a:avLst/>
@@ -3884,7 +4434,7 @@
           <a:effectLst/>
         </p:spPr>
         <p:txBody>
-          <a:bodyPr wrap="square" lIns="27432" rIns="27432" tIns="18288" bIns="18288" anchor="ctr">
+          <a:bodyPr wrap="none" lIns="18288" rIns="18288" tIns="18288" bIns="18288" anchor="t">
             <a:spAutoFit/>
           </a:bodyPr>
           <a:lstStyle/>
@@ -3895,27 +4445,43 @@
               </a:spcAft>
             </a:pPr>
             <a:r>
-              <a:rPr sz="1150" b="0" i="0">
+              <a:rPr sz="1250" b="0" i="0">
                 <a:solidFill>
-                  <a:srgbClr val="8EDBD4"/>
+                  <a:srgbClr val="F2B880"/>
                 </a:solidFill>
                 <a:latin typeface="Arial"/>
               </a:rPr>
-              <a:t>Early compressive pressure is not buried release-interface traction</a:t>
-            </a:r>
-          </a:p>
-        </p:txBody>
-      </p:sp>
-      <p:sp>
-        <p:nvSpPr>
-          <p:cNvPr id="24" name="C3-E33 text 22" descr="sci-ppt:o022"/>
+              <a:t>A finite impact scale is an input to load-path</a:t>
+            </a:r>
+          </a:p>
+          <a:p>
+            <a:pPr algn="l">
+              <a:spcAft>
+                <a:spcPts val="0"/>
+              </a:spcAft>
+            </a:pPr>
+            <a:r>
+              <a:rPr sz="1250" b="0" i="0">
+                <a:solidFill>
+                  <a:srgbClr val="F2B880"/>
+                </a:solidFill>
+                <a:latin typeface="Arial"/>
+              </a:rPr>
+              <a:t>analysis, not proof of intact release.</a:t>
+            </a:r>
+          </a:p>
+        </p:txBody>
+      </p:sp>
+      <p:sp>
+        <p:nvSpPr>
+          <p:cNvPr id="35" name="C3-E33 text 33" descr="sci-ppt:o033"/>
           <p:cNvSpPr txBox="1"/>
           <p:nvPr/>
         </p:nvSpPr>
         <p:spPr>
           <a:xfrm>
-            <a:off x="320040" y="6473952"/>
-            <a:ext cx="11430000" cy="256032"/>
+            <a:off x="320040" y="6510528"/>
+            <a:ext cx="11521440" cy="200660"/>
           </a:xfrm>
           <a:prstGeom prst="rect">
             <a:avLst/>
@@ -3924,7 +4490,7 @@
           <a:effectLst/>
         </p:spPr>
         <p:txBody>
-          <a:bodyPr wrap="square" lIns="27432" rIns="27432" tIns="18288" bIns="18288" anchor="ctr">
+          <a:bodyPr wrap="none" lIns="18288" rIns="18288" tIns="18288" bIns="18288" anchor="t">
             <a:spAutoFit/>
           </a:bodyPr>
           <a:lstStyle/>
@@ -3941,7 +4507,7 @@
                 </a:solidFill>
                 <a:latin typeface="Arial"/>
               </a:rPr>
-              <a:t>Model schematic; geometry is not to scale.</a:t>
+              <a:t>Reference formulas of the Defence 3 answer: Eqs. C3-E24, E25, E26.</a:t>
             </a:r>
           </a:p>
         </p:txBody>
